--- a/오픈소스소프트웨어/4주차-3_리눅스 패키지 실습.pptx
+++ b/오픈소스소프트웨어/4주차-3_리눅스 패키지 실습.pptx
@@ -1019,6 +1019,13 @@
           </a:solidFill>
           <a:ln/>
         </p:spPr>
+        <p:txBody>
+          <a:bodyPr/>
+          <a:lstStyle/>
+          <a:p>
+            <a:endParaRPr lang="ko-KR" altLang="en-US"/>
+          </a:p>
+        </p:txBody>
       </p:sp>
       <p:sp>
         <p:nvSpPr>
@@ -1041,6 +1048,13 @@
           </a:solidFill>
           <a:ln/>
         </p:spPr>
+        <p:txBody>
+          <a:bodyPr/>
+          <a:lstStyle/>
+          <a:p>
+            <a:endParaRPr lang="ko-KR" altLang="en-US"/>
+          </a:p>
+        </p:txBody>
       </p:sp>
       <p:sp>
         <p:nvSpPr>
@@ -1063,6 +1077,13 @@
           </a:solidFill>
           <a:ln/>
         </p:spPr>
+        <p:txBody>
+          <a:bodyPr/>
+          <a:lstStyle/>
+          <a:p>
+            <a:endParaRPr lang="ko-KR" altLang="en-US"/>
+          </a:p>
+        </p:txBody>
       </p:sp>
       <p:sp>
         <p:nvSpPr>
@@ -1085,6 +1106,13 @@
           </a:solidFill>
           <a:ln/>
         </p:spPr>
+        <p:txBody>
+          <a:bodyPr/>
+          <a:lstStyle/>
+          <a:p>
+            <a:endParaRPr lang="ko-KR" altLang="en-US"/>
+          </a:p>
+        </p:txBody>
       </p:sp>
       <p:sp>
         <p:nvSpPr>
@@ -1107,6 +1135,13 @@
           </a:solidFill>
           <a:ln/>
         </p:spPr>
+        <p:txBody>
+          <a:bodyPr/>
+          <a:lstStyle/>
+          <a:p>
+            <a:endParaRPr lang="ko-KR" altLang="en-US"/>
+          </a:p>
+        </p:txBody>
       </p:sp>
       <p:sp>
         <p:nvSpPr>
@@ -1129,6 +1164,13 @@
           </a:solidFill>
           <a:ln/>
         </p:spPr>
+        <p:txBody>
+          <a:bodyPr/>
+          <a:lstStyle/>
+          <a:p>
+            <a:endParaRPr lang="ko-KR" altLang="en-US"/>
+          </a:p>
+        </p:txBody>
       </p:sp>
       <p:sp>
         <p:nvSpPr>
@@ -1151,6 +1193,13 @@
           </a:solidFill>
           <a:ln/>
         </p:spPr>
+        <p:txBody>
+          <a:bodyPr/>
+          <a:lstStyle/>
+          <a:p>
+            <a:endParaRPr lang="ko-KR" altLang="en-US"/>
+          </a:p>
+        </p:txBody>
       </p:sp>
       <p:sp>
         <p:nvSpPr>
@@ -1173,6 +1222,13 @@
           </a:solidFill>
           <a:ln/>
         </p:spPr>
+        <p:txBody>
+          <a:bodyPr/>
+          <a:lstStyle/>
+          <a:p>
+            <a:endParaRPr lang="ko-KR" altLang="en-US"/>
+          </a:p>
+        </p:txBody>
       </p:sp>
       <p:sp>
         <p:nvSpPr>
@@ -1198,6 +1254,13 @@
             <a:prstDash val="solid"/>
           </a:ln>
         </p:spPr>
+        <p:txBody>
+          <a:bodyPr/>
+          <a:lstStyle/>
+          <a:p>
+            <a:endParaRPr lang="ko-KR" altLang="en-US"/>
+          </a:p>
+        </p:txBody>
       </p:sp>
       <p:sp>
         <p:nvSpPr>
@@ -1223,6 +1286,13 @@
             <a:prstDash val="solid"/>
           </a:ln>
         </p:spPr>
+        <p:txBody>
+          <a:bodyPr/>
+          <a:lstStyle/>
+          <a:p>
+            <a:endParaRPr lang="ko-KR" altLang="en-US"/>
+          </a:p>
+        </p:txBody>
       </p:sp>
       <p:sp>
         <p:nvSpPr>
@@ -1248,6 +1318,13 @@
             <a:prstDash val="solid"/>
           </a:ln>
         </p:spPr>
+        <p:txBody>
+          <a:bodyPr/>
+          <a:lstStyle/>
+          <a:p>
+            <a:endParaRPr lang="ko-KR" altLang="en-US"/>
+          </a:p>
+        </p:txBody>
       </p:sp>
       <p:sp>
         <p:nvSpPr>
@@ -1273,6 +1350,13 @@
             <a:prstDash val="solid"/>
           </a:ln>
         </p:spPr>
+        <p:txBody>
+          <a:bodyPr/>
+          <a:lstStyle/>
+          <a:p>
+            <a:endParaRPr lang="ko-KR" altLang="en-US"/>
+          </a:p>
+        </p:txBody>
       </p:sp>
       <p:sp>
         <p:nvSpPr>
@@ -1298,6 +1382,13 @@
             <a:prstDash val="solid"/>
           </a:ln>
         </p:spPr>
+        <p:txBody>
+          <a:bodyPr/>
+          <a:lstStyle/>
+          <a:p>
+            <a:endParaRPr lang="ko-KR" altLang="en-US"/>
+          </a:p>
+        </p:txBody>
       </p:sp>
       <p:sp>
         <p:nvSpPr>
@@ -1323,6 +1414,13 @@
             <a:prstDash val="solid"/>
           </a:ln>
         </p:spPr>
+        <p:txBody>
+          <a:bodyPr/>
+          <a:lstStyle/>
+          <a:p>
+            <a:endParaRPr lang="ko-KR" altLang="en-US"/>
+          </a:p>
+        </p:txBody>
       </p:sp>
       <p:sp>
         <p:nvSpPr>
@@ -1348,6 +1446,13 @@
             <a:prstDash val="solid"/>
           </a:ln>
         </p:spPr>
+        <p:txBody>
+          <a:bodyPr/>
+          <a:lstStyle/>
+          <a:p>
+            <a:endParaRPr lang="ko-KR" altLang="en-US"/>
+          </a:p>
+        </p:txBody>
       </p:sp>
       <p:sp>
         <p:nvSpPr>
@@ -1567,6 +1672,13 @@
             <a:prstDash val="solid"/>
           </a:ln>
         </p:spPr>
+        <p:txBody>
+          <a:bodyPr/>
+          <a:lstStyle/>
+          <a:p>
+            <a:endParaRPr lang="ko-KR" altLang="en-US"/>
+          </a:p>
+        </p:txBody>
       </p:sp>
       <p:sp>
         <p:nvSpPr>
@@ -1672,6 +1784,13 @@
             <a:prstDash val="solid"/>
           </a:ln>
         </p:spPr>
+        <p:txBody>
+          <a:bodyPr/>
+          <a:lstStyle/>
+          <a:p>
+            <a:endParaRPr lang="ko-KR" altLang="en-US"/>
+          </a:p>
+        </p:txBody>
       </p:sp>
       <p:sp>
         <p:nvSpPr>
@@ -1733,6 +1852,13 @@
           </a:solidFill>
           <a:ln/>
         </p:spPr>
+        <p:txBody>
+          <a:bodyPr/>
+          <a:lstStyle/>
+          <a:p>
+            <a:endParaRPr lang="ko-KR" altLang="en-US"/>
+          </a:p>
+        </p:txBody>
       </p:sp>
       <p:sp>
         <p:nvSpPr>
@@ -1796,6 +1922,13 @@
             <a:tailEnd type="triangle"/>
           </a:ln>
         </p:spPr>
+        <p:txBody>
+          <a:bodyPr/>
+          <a:lstStyle/>
+          <a:p>
+            <a:endParaRPr lang="ko-KR" altLang="en-US"/>
+          </a:p>
+        </p:txBody>
       </p:sp>
       <p:sp>
         <p:nvSpPr>
@@ -1940,6 +2073,13 @@
             <a:prstDash val="solid"/>
           </a:ln>
         </p:spPr>
+        <p:txBody>
+          <a:bodyPr/>
+          <a:lstStyle/>
+          <a:p>
+            <a:endParaRPr lang="ko-KR" altLang="en-US"/>
+          </a:p>
+        </p:txBody>
       </p:sp>
       <p:sp>
         <p:nvSpPr>
@@ -1962,6 +2102,13 @@
           </a:solidFill>
           <a:ln/>
         </p:spPr>
+        <p:txBody>
+          <a:bodyPr/>
+          <a:lstStyle/>
+          <a:p>
+            <a:endParaRPr lang="ko-KR" altLang="en-US"/>
+          </a:p>
+        </p:txBody>
       </p:sp>
       <p:sp>
         <p:nvSpPr>
@@ -2149,6 +2296,13 @@
             <a:tailEnd type="none" w="med" len="med"/>
           </a:ln>
         </p:spPr>
+        <p:txBody>
+          <a:bodyPr/>
+          <a:lstStyle/>
+          <a:p>
+            <a:endParaRPr lang="ko-KR" altLang="en-US"/>
+          </a:p>
+        </p:txBody>
       </p:sp>
     </p:spTree>
   </p:cSld>
@@ -2209,6 +2363,13 @@
             <a:prstDash val="solid"/>
           </a:ln>
         </p:spPr>
+        <p:txBody>
+          <a:bodyPr/>
+          <a:lstStyle/>
+          <a:p>
+            <a:endParaRPr lang="ko-KR" altLang="en-US"/>
+          </a:p>
+        </p:txBody>
       </p:sp>
       <p:sp>
         <p:nvSpPr>
@@ -2384,6 +2545,13 @@
             <a:prstDash val="solid"/>
           </a:ln>
         </p:spPr>
+        <p:txBody>
+          <a:bodyPr/>
+          <a:lstStyle/>
+          <a:p>
+            <a:endParaRPr lang="ko-KR" altLang="en-US"/>
+          </a:p>
+        </p:txBody>
       </p:sp>
       <p:sp>
         <p:nvSpPr>
@@ -2411,6 +2579,13 @@
             </a:outerShdw>
           </a:effectLst>
         </p:spPr>
+        <p:txBody>
+          <a:bodyPr/>
+          <a:lstStyle/>
+          <a:p>
+            <a:endParaRPr lang="ko-KR" altLang="en-US"/>
+          </a:p>
+        </p:txBody>
       </p:sp>
       <p:sp>
         <p:nvSpPr>
@@ -2558,6 +2733,13 @@
             <a:prstDash val="solid"/>
           </a:ln>
         </p:spPr>
+        <p:txBody>
+          <a:bodyPr/>
+          <a:lstStyle/>
+          <a:p>
+            <a:endParaRPr lang="ko-KR" altLang="en-US"/>
+          </a:p>
+        </p:txBody>
       </p:sp>
       <p:sp>
         <p:nvSpPr>
@@ -2585,6 +2767,13 @@
             </a:outerShdw>
           </a:effectLst>
         </p:spPr>
+        <p:txBody>
+          <a:bodyPr/>
+          <a:lstStyle/>
+          <a:p>
+            <a:endParaRPr lang="ko-KR" altLang="en-US"/>
+          </a:p>
+        </p:txBody>
       </p:sp>
       <p:sp>
         <p:nvSpPr>
@@ -2732,6 +2921,13 @@
             <a:prstDash val="solid"/>
           </a:ln>
         </p:spPr>
+        <p:txBody>
+          <a:bodyPr/>
+          <a:lstStyle/>
+          <a:p>
+            <a:endParaRPr lang="ko-KR" altLang="en-US"/>
+          </a:p>
+        </p:txBody>
       </p:sp>
       <p:sp>
         <p:nvSpPr>
@@ -2759,6 +2955,13 @@
             </a:outerShdw>
           </a:effectLst>
         </p:spPr>
+        <p:txBody>
+          <a:bodyPr/>
+          <a:lstStyle/>
+          <a:p>
+            <a:endParaRPr lang="ko-KR" altLang="en-US"/>
+          </a:p>
+        </p:txBody>
       </p:sp>
       <p:sp>
         <p:nvSpPr>
@@ -2906,6 +3109,13 @@
             <a:prstDash val="solid"/>
           </a:ln>
         </p:spPr>
+        <p:txBody>
+          <a:bodyPr/>
+          <a:lstStyle/>
+          <a:p>
+            <a:endParaRPr lang="ko-KR" altLang="en-US"/>
+          </a:p>
+        </p:txBody>
       </p:sp>
       <p:sp>
         <p:nvSpPr>
@@ -2928,6 +3138,13 @@
           </a:solidFill>
           <a:ln/>
         </p:spPr>
+        <p:txBody>
+          <a:bodyPr/>
+          <a:lstStyle/>
+          <a:p>
+            <a:endParaRPr lang="ko-KR" altLang="en-US"/>
+          </a:p>
+        </p:txBody>
       </p:sp>
       <p:sp>
         <p:nvSpPr>
@@ -3318,6 +3535,13 @@
             <a:prstDash val="solid"/>
           </a:ln>
         </p:spPr>
+        <p:txBody>
+          <a:bodyPr/>
+          <a:lstStyle/>
+          <a:p>
+            <a:endParaRPr lang="ko-KR" altLang="en-US"/>
+          </a:p>
+        </p:txBody>
       </p:sp>
       <p:sp>
         <p:nvSpPr>
@@ -3423,6 +3647,13 @@
             </a:outerShdw>
           </a:effectLst>
         </p:spPr>
+        <p:txBody>
+          <a:bodyPr/>
+          <a:lstStyle/>
+          <a:p>
+            <a:endParaRPr lang="ko-KR" altLang="en-US"/>
+          </a:p>
+        </p:txBody>
       </p:sp>
       <p:sp>
         <p:nvSpPr>
@@ -3572,6 +3803,13 @@
             </a:outerShdw>
           </a:effectLst>
         </p:spPr>
+        <p:txBody>
+          <a:bodyPr/>
+          <a:lstStyle/>
+          <a:p>
+            <a:endParaRPr lang="ko-KR" altLang="en-US"/>
+          </a:p>
+        </p:txBody>
       </p:sp>
       <p:sp>
         <p:nvSpPr>
@@ -3652,6 +3890,13 @@
             </a:outerShdw>
           </a:effectLst>
         </p:spPr>
+        <p:txBody>
+          <a:bodyPr/>
+          <a:lstStyle/>
+          <a:p>
+            <a:endParaRPr lang="ko-KR" altLang="en-US"/>
+          </a:p>
+        </p:txBody>
       </p:sp>
       <p:sp>
         <p:nvSpPr>
@@ -3801,6 +4046,13 @@
             </a:outerShdw>
           </a:effectLst>
         </p:spPr>
+        <p:txBody>
+          <a:bodyPr/>
+          <a:lstStyle/>
+          <a:p>
+            <a:endParaRPr lang="ko-KR" altLang="en-US"/>
+          </a:p>
+        </p:txBody>
       </p:sp>
       <p:sp>
         <p:nvSpPr>
@@ -3881,6 +4133,13 @@
             </a:outerShdw>
           </a:effectLst>
         </p:spPr>
+        <p:txBody>
+          <a:bodyPr/>
+          <a:lstStyle/>
+          <a:p>
+            <a:endParaRPr lang="ko-KR" altLang="en-US"/>
+          </a:p>
+        </p:txBody>
       </p:sp>
       <p:sp>
         <p:nvSpPr>
@@ -4030,6 +4289,13 @@
             </a:outerShdw>
           </a:effectLst>
         </p:spPr>
+        <p:txBody>
+          <a:bodyPr/>
+          <a:lstStyle/>
+          <a:p>
+            <a:endParaRPr lang="ko-KR" altLang="en-US"/>
+          </a:p>
+        </p:txBody>
       </p:sp>
       <p:sp>
         <p:nvSpPr>
@@ -4221,6 +4487,13 @@
             <a:prstDash val="solid"/>
           </a:ln>
         </p:spPr>
+        <p:txBody>
+          <a:bodyPr/>
+          <a:lstStyle/>
+          <a:p>
+            <a:endParaRPr lang="ko-KR" altLang="en-US"/>
+          </a:p>
+        </p:txBody>
       </p:sp>
       <p:sp>
         <p:nvSpPr>
@@ -4326,6 +4599,13 @@
             </a:outerShdw>
           </a:effectLst>
         </p:spPr>
+        <p:txBody>
+          <a:bodyPr/>
+          <a:lstStyle/>
+          <a:p>
+            <a:endParaRPr lang="ko-KR" altLang="en-US"/>
+          </a:p>
+        </p:txBody>
       </p:sp>
       <p:sp>
         <p:nvSpPr>
@@ -4475,6 +4755,13 @@
             </a:outerShdw>
           </a:effectLst>
         </p:spPr>
+        <p:txBody>
+          <a:bodyPr/>
+          <a:lstStyle/>
+          <a:p>
+            <a:endParaRPr lang="ko-KR" altLang="en-US"/>
+          </a:p>
+        </p:txBody>
       </p:sp>
       <p:sp>
         <p:nvSpPr>
@@ -4617,6 +4904,13 @@
             <a:prstDash val="solid"/>
           </a:ln>
         </p:spPr>
+        <p:txBody>
+          <a:bodyPr/>
+          <a:lstStyle/>
+          <a:p>
+            <a:endParaRPr lang="ko-KR" altLang="en-US"/>
+          </a:p>
+        </p:txBody>
       </p:sp>
       <p:sp>
         <p:nvSpPr>
@@ -4639,6 +4933,13 @@
           </a:solidFill>
           <a:ln/>
         </p:spPr>
+        <p:txBody>
+          <a:bodyPr/>
+          <a:lstStyle/>
+          <a:p>
+            <a:endParaRPr lang="ko-KR" altLang="en-US"/>
+          </a:p>
+        </p:txBody>
       </p:sp>
       <p:sp>
         <p:nvSpPr>
@@ -4775,6 +5076,13 @@
             <a:prstDash val="solid"/>
           </a:ln>
         </p:spPr>
+        <p:txBody>
+          <a:bodyPr/>
+          <a:lstStyle/>
+          <a:p>
+            <a:endParaRPr lang="ko-KR" altLang="en-US"/>
+          </a:p>
+        </p:txBody>
       </p:sp>
       <p:sp>
         <p:nvSpPr>
@@ -4797,6 +5105,13 @@
           </a:solidFill>
           <a:ln/>
         </p:spPr>
+        <p:txBody>
+          <a:bodyPr/>
+          <a:lstStyle/>
+          <a:p>
+            <a:endParaRPr lang="ko-KR" altLang="en-US"/>
+          </a:p>
+        </p:txBody>
       </p:sp>
       <p:sp>
         <p:nvSpPr>
